--- a/outputs/GFCC31May2026_OrdinaryTime.pptx
+++ b/outputs/GFCC31May2026_OrdinaryTime.pptx
@@ -5618,7 +5618,7 @@
               </a:defRPr>
             </a:pPr>
             <a:r>
-              <a:t>Responsorial Psalm</a:t>
+              <a:t>Responsorial Canticle</a:t>
             </a:r>
             <a:br/>
             <a:r>
